--- a/DP-800/DP-800-Jour 1 - Session 3.pptx
+++ b/DP-800/DP-800-Jour 1 - Session 3.pptx
@@ -122,7 +122,7 @@
 <file path=ppt/revisionInfo.xml><?xml version="1.0" encoding="utf-8"?>
 <p1510:revInfo xmlns:a="http://schemas.openxmlformats.org/drawingml/2006/main" xmlns:r="http://schemas.openxmlformats.org/officeDocument/2006/relationships" xmlns:p1510="http://schemas.microsoft.com/office/powerpoint/2015/10/main">
   <p1510:revLst>
-    <p1510:client id="{30DE4293-55EE-4398-84B7-AAE8096400FE}" v="1" dt="2026-07-28T13:49:04.893"/>
+    <p1510:client id="{30DE4293-55EE-4398-84B7-AAE8096400FE}" v="5" dt="2026-07-29T15:39:38.394"/>
   </p1510:revLst>
 </p1510:revInfo>
 </file>
@@ -132,18 +132,18 @@
   <pc:docChgLst>
     <pc:chgData name="Rodrigue YENGO" userId="9019d928-c12d-48de-bdb2-52a833805ac2" providerId="ADAL" clId="{20734E0D-FF75-44B1-9DFF-D19DBB4D069A}"/>
     <pc:docChg chg="custSel modSld modMainMaster">
-      <pc:chgData name="Rodrigue YENGO" userId="9019d928-c12d-48de-bdb2-52a833805ac2" providerId="ADAL" clId="{20734E0D-FF75-44B1-9DFF-D19DBB4D069A}" dt="2026-07-28T13:58:49.791" v="43" actId="478"/>
+      <pc:chgData name="Rodrigue YENGO" userId="9019d928-c12d-48de-bdb2-52a833805ac2" providerId="ADAL" clId="{20734E0D-FF75-44B1-9DFF-D19DBB4D069A}" dt="2026-07-29T17:03:29.261" v="74" actId="22"/>
       <pc:docMkLst>
         <pc:docMk/>
       </pc:docMkLst>
-      <pc:sldChg chg="delSp modSp mod">
-        <pc:chgData name="Rodrigue YENGO" userId="9019d928-c12d-48de-bdb2-52a833805ac2" providerId="ADAL" clId="{20734E0D-FF75-44B1-9DFF-D19DBB4D069A}" dt="2026-07-28T13:57:27.954" v="35" actId="478"/>
+      <pc:sldChg chg="addSp delSp modSp mod">
+        <pc:chgData name="Rodrigue YENGO" userId="9019d928-c12d-48de-bdb2-52a833805ac2" providerId="ADAL" clId="{20734E0D-FF75-44B1-9DFF-D19DBB4D069A}" dt="2026-07-29T15:37:39.678" v="58" actId="207"/>
         <pc:sldMkLst>
           <pc:docMk/>
           <pc:sldMk cId="0" sldId="256"/>
         </pc:sldMkLst>
-        <pc:spChg chg="mod">
-          <ac:chgData name="Rodrigue YENGO" userId="9019d928-c12d-48de-bdb2-52a833805ac2" providerId="ADAL" clId="{20734E0D-FF75-44B1-9DFF-D19DBB4D069A}" dt="2026-07-28T13:49:52.666" v="32" actId="1038"/>
+        <pc:spChg chg="del mod">
+          <ac:chgData name="Rodrigue YENGO" userId="9019d928-c12d-48de-bdb2-52a833805ac2" providerId="ADAL" clId="{20734E0D-FF75-44B1-9DFF-D19DBB4D069A}" dt="2026-07-29T15:36:25.674" v="52" actId="478"/>
           <ac:spMkLst>
             <pc:docMk/>
             <pc:sldMk cId="0" sldId="256"/>
@@ -166,37 +166,101 @@
             <ac:spMk id="4" creationId="{00000000-0000-0000-0000-000000000000}"/>
           </ac:spMkLst>
         </pc:spChg>
-        <pc:spChg chg="mod">
-          <ac:chgData name="Rodrigue YENGO" userId="9019d928-c12d-48de-bdb2-52a833805ac2" providerId="ADAL" clId="{20734E0D-FF75-44B1-9DFF-D19DBB4D069A}" dt="2026-07-28T13:47:14.011" v="2" actId="27636"/>
+        <pc:spChg chg="del mod">
+          <ac:chgData name="Rodrigue YENGO" userId="9019d928-c12d-48de-bdb2-52a833805ac2" providerId="ADAL" clId="{20734E0D-FF75-44B1-9DFF-D19DBB4D069A}" dt="2026-07-29T15:36:34.624" v="53" actId="478"/>
           <ac:spMkLst>
             <pc:docMk/>
             <pc:sldMk cId="0" sldId="256"/>
             <ac:spMk id="6" creationId="{00000000-0000-0000-0000-000000000000}"/>
           </ac:spMkLst>
         </pc:spChg>
-        <pc:spChg chg="mod">
-          <ac:chgData name="Rodrigue YENGO" userId="9019d928-c12d-48de-bdb2-52a833805ac2" providerId="ADAL" clId="{20734E0D-FF75-44B1-9DFF-D19DBB4D069A}" dt="2026-07-28T13:47:14.003" v="0" actId="27636"/>
+        <pc:spChg chg="del mod">
+          <ac:chgData name="Rodrigue YENGO" userId="9019d928-c12d-48de-bdb2-52a833805ac2" providerId="ADAL" clId="{20734E0D-FF75-44B1-9DFF-D19DBB4D069A}" dt="2026-07-29T15:36:34.624" v="53" actId="478"/>
           <ac:spMkLst>
             <pc:docMk/>
             <pc:sldMk cId="0" sldId="256"/>
             <ac:spMk id="7" creationId="{00000000-0000-0000-0000-000000000000}"/>
           </ac:spMkLst>
         </pc:spChg>
-        <pc:spChg chg="mod">
-          <ac:chgData name="Rodrigue YENGO" userId="9019d928-c12d-48de-bdb2-52a833805ac2" providerId="ADAL" clId="{20734E0D-FF75-44B1-9DFF-D19DBB4D069A}" dt="2026-07-28T13:47:14.015" v="4" actId="27636"/>
+        <pc:spChg chg="del mod">
+          <ac:chgData name="Rodrigue YENGO" userId="9019d928-c12d-48de-bdb2-52a833805ac2" providerId="ADAL" clId="{20734E0D-FF75-44B1-9DFF-D19DBB4D069A}" dt="2026-07-29T15:36:34.624" v="53" actId="478"/>
           <ac:spMkLst>
             <pc:docMk/>
             <pc:sldMk cId="0" sldId="256"/>
             <ac:spMk id="8" creationId="{00000000-0000-0000-0000-000000000000}"/>
           </ac:spMkLst>
         </pc:spChg>
+        <pc:spChg chg="mod">
+          <ac:chgData name="Rodrigue YENGO" userId="9019d928-c12d-48de-bdb2-52a833805ac2" providerId="ADAL" clId="{20734E0D-FF75-44B1-9DFF-D19DBB4D069A}" dt="2026-07-29T15:37:39.678" v="58" actId="207"/>
+          <ac:spMkLst>
+            <pc:docMk/>
+            <pc:sldMk cId="0" sldId="256"/>
+            <ac:spMk id="12" creationId="{4DC04E83-1569-E880-0C07-1F28CC3B9164}"/>
+          </ac:spMkLst>
+        </pc:spChg>
+        <pc:spChg chg="mod">
+          <ac:chgData name="Rodrigue YENGO" userId="9019d928-c12d-48de-bdb2-52a833805ac2" providerId="ADAL" clId="{20734E0D-FF75-44B1-9DFF-D19DBB4D069A}" dt="2026-07-29T15:37:39.678" v="58" actId="207"/>
+          <ac:spMkLst>
+            <pc:docMk/>
+            <pc:sldMk cId="0" sldId="256"/>
+            <ac:spMk id="13" creationId="{6039C797-7483-0477-9B29-70DE87F3ABAD}"/>
+          </ac:spMkLst>
+        </pc:spChg>
+        <pc:grpChg chg="add mod">
+          <ac:chgData name="Rodrigue YENGO" userId="9019d928-c12d-48de-bdb2-52a833805ac2" providerId="ADAL" clId="{20734E0D-FF75-44B1-9DFF-D19DBB4D069A}" dt="2026-07-29T15:36:12.929" v="50"/>
+          <ac:grpSpMkLst>
+            <pc:docMk/>
+            <pc:sldMk cId="0" sldId="256"/>
+            <ac:grpSpMk id="3" creationId="{A21843AA-C9EA-CBC8-3314-15BF01F62D60}"/>
+          </ac:grpSpMkLst>
+        </pc:grpChg>
+        <pc:picChg chg="add del mod">
+          <ac:chgData name="Rodrigue YENGO" userId="9019d928-c12d-48de-bdb2-52a833805ac2" providerId="ADAL" clId="{20734E0D-FF75-44B1-9DFF-D19DBB4D069A}" dt="2026-07-28T15:41:28.793" v="48" actId="478"/>
+          <ac:picMkLst>
+            <pc:docMk/>
+            <pc:sldMk cId="0" sldId="256"/>
+            <ac:picMk id="9" creationId="{1E89FE3D-6195-A8A5-CD75-93DAB9A1092F}"/>
+          </ac:picMkLst>
+        </pc:picChg>
+        <pc:picChg chg="mod">
+          <ac:chgData name="Rodrigue YENGO" userId="9019d928-c12d-48de-bdb2-52a833805ac2" providerId="ADAL" clId="{20734E0D-FF75-44B1-9DFF-D19DBB4D069A}" dt="2026-07-29T15:36:12.929" v="50"/>
+          <ac:picMkLst>
+            <pc:docMk/>
+            <pc:sldMk cId="0" sldId="256"/>
+            <ac:picMk id="9" creationId="{91AD9F1A-52A5-1EA5-6FFF-F19291532B95}"/>
+          </ac:picMkLst>
+        </pc:picChg>
+        <pc:picChg chg="mod">
+          <ac:chgData name="Rodrigue YENGO" userId="9019d928-c12d-48de-bdb2-52a833805ac2" providerId="ADAL" clId="{20734E0D-FF75-44B1-9DFF-D19DBB4D069A}" dt="2026-07-29T15:36:12.929" v="50"/>
+          <ac:picMkLst>
+            <pc:docMk/>
+            <pc:sldMk cId="0" sldId="256"/>
+            <ac:picMk id="10" creationId="{F8E1D38C-92C0-92E1-C3D8-A2EB11E54284}"/>
+          </ac:picMkLst>
+        </pc:picChg>
+        <pc:picChg chg="mod">
+          <ac:chgData name="Rodrigue YENGO" userId="9019d928-c12d-48de-bdb2-52a833805ac2" providerId="ADAL" clId="{20734E0D-FF75-44B1-9DFF-D19DBB4D069A}" dt="2026-07-29T15:36:12.929" v="50"/>
+          <ac:picMkLst>
+            <pc:docMk/>
+            <pc:sldMk cId="0" sldId="256"/>
+            <ac:picMk id="11" creationId="{6616A417-C903-2C12-755B-5CED86B9E35F}"/>
+          </ac:picMkLst>
+        </pc:picChg>
       </pc:sldChg>
       <pc:sldChg chg="delSp modSp mod">
-        <pc:chgData name="Rodrigue YENGO" userId="9019d928-c12d-48de-bdb2-52a833805ac2" providerId="ADAL" clId="{20734E0D-FF75-44B1-9DFF-D19DBB4D069A}" dt="2026-07-28T13:57:57.892" v="38" actId="478"/>
+        <pc:chgData name="Rodrigue YENGO" userId="9019d928-c12d-48de-bdb2-52a833805ac2" providerId="ADAL" clId="{20734E0D-FF75-44B1-9DFF-D19DBB4D069A}" dt="2026-07-29T15:38:04.908" v="60" actId="478"/>
         <pc:sldMkLst>
           <pc:docMk/>
           <pc:sldMk cId="0" sldId="257"/>
         </pc:sldMkLst>
+        <pc:spChg chg="del">
+          <ac:chgData name="Rodrigue YENGO" userId="9019d928-c12d-48de-bdb2-52a833805ac2" providerId="ADAL" clId="{20734E0D-FF75-44B1-9DFF-D19DBB4D069A}" dt="2026-07-29T15:37:57.357" v="59" actId="478"/>
+          <ac:spMkLst>
+            <pc:docMk/>
+            <pc:sldMk cId="0" sldId="257"/>
+            <ac:spMk id="2" creationId="{00000000-0000-0000-0000-000000000000}"/>
+          </ac:spMkLst>
+        </pc:spChg>
         <pc:spChg chg="del mod">
           <ac:chgData name="Rodrigue YENGO" userId="9019d928-c12d-48de-bdb2-52a833805ac2" providerId="ADAL" clId="{20734E0D-FF75-44B1-9DFF-D19DBB4D069A}" dt="2026-07-28T13:57:57.892" v="38" actId="478"/>
           <ac:spMkLst>
@@ -245,13 +309,29 @@
             <ac:spMk id="11" creationId="{00000000-0000-0000-0000-000000000000}"/>
           </ac:spMkLst>
         </pc:spChg>
+        <pc:picChg chg="del">
+          <ac:chgData name="Rodrigue YENGO" userId="9019d928-c12d-48de-bdb2-52a833805ac2" providerId="ADAL" clId="{20734E0D-FF75-44B1-9DFF-D19DBB4D069A}" dt="2026-07-29T15:38:04.908" v="60" actId="478"/>
+          <ac:picMkLst>
+            <pc:docMk/>
+            <pc:sldMk cId="0" sldId="257"/>
+            <ac:picMk id="13" creationId="{00000000-0000-0000-0000-000000000000}"/>
+          </ac:picMkLst>
+        </pc:picChg>
       </pc:sldChg>
       <pc:sldChg chg="delSp modSp mod">
-        <pc:chgData name="Rodrigue YENGO" userId="9019d928-c12d-48de-bdb2-52a833805ac2" providerId="ADAL" clId="{20734E0D-FF75-44B1-9DFF-D19DBB4D069A}" dt="2026-07-28T13:58:02.991" v="39" actId="478"/>
+        <pc:chgData name="Rodrigue YENGO" userId="9019d928-c12d-48de-bdb2-52a833805ac2" providerId="ADAL" clId="{20734E0D-FF75-44B1-9DFF-D19DBB4D069A}" dt="2026-07-29T15:38:13.020" v="62" actId="478"/>
         <pc:sldMkLst>
           <pc:docMk/>
           <pc:sldMk cId="0" sldId="258"/>
         </pc:sldMkLst>
+        <pc:spChg chg="del">
+          <ac:chgData name="Rodrigue YENGO" userId="9019d928-c12d-48de-bdb2-52a833805ac2" providerId="ADAL" clId="{20734E0D-FF75-44B1-9DFF-D19DBB4D069A}" dt="2026-07-29T15:38:10.440" v="61" actId="478"/>
+          <ac:spMkLst>
+            <pc:docMk/>
+            <pc:sldMk cId="0" sldId="258"/>
+            <ac:spMk id="2" creationId="{00000000-0000-0000-0000-000000000000}"/>
+          </ac:spMkLst>
+        </pc:spChg>
         <pc:spChg chg="del mod">
           <ac:chgData name="Rodrigue YENGO" userId="9019d928-c12d-48de-bdb2-52a833805ac2" providerId="ADAL" clId="{20734E0D-FF75-44B1-9DFF-D19DBB4D069A}" dt="2026-07-28T13:58:02.991" v="39" actId="478"/>
           <ac:spMkLst>
@@ -284,13 +364,29 @@
             <ac:spMk id="7" creationId="{00000000-0000-0000-0000-000000000000}"/>
           </ac:spMkLst>
         </pc:spChg>
+        <pc:picChg chg="del">
+          <ac:chgData name="Rodrigue YENGO" userId="9019d928-c12d-48de-bdb2-52a833805ac2" providerId="ADAL" clId="{20734E0D-FF75-44B1-9DFF-D19DBB4D069A}" dt="2026-07-29T15:38:13.020" v="62" actId="478"/>
+          <ac:picMkLst>
+            <pc:docMk/>
+            <pc:sldMk cId="0" sldId="258"/>
+            <ac:picMk id="8" creationId="{00000000-0000-0000-0000-000000000000}"/>
+          </ac:picMkLst>
+        </pc:picChg>
       </pc:sldChg>
       <pc:sldChg chg="delSp modSp mod">
-        <pc:chgData name="Rodrigue YENGO" userId="9019d928-c12d-48de-bdb2-52a833805ac2" providerId="ADAL" clId="{20734E0D-FF75-44B1-9DFF-D19DBB4D069A}" dt="2026-07-28T13:58:07.238" v="40" actId="478"/>
+        <pc:chgData name="Rodrigue YENGO" userId="9019d928-c12d-48de-bdb2-52a833805ac2" providerId="ADAL" clId="{20734E0D-FF75-44B1-9DFF-D19DBB4D069A}" dt="2026-07-29T15:38:23.837" v="64" actId="478"/>
         <pc:sldMkLst>
           <pc:docMk/>
           <pc:sldMk cId="0" sldId="259"/>
         </pc:sldMkLst>
+        <pc:spChg chg="del">
+          <ac:chgData name="Rodrigue YENGO" userId="9019d928-c12d-48de-bdb2-52a833805ac2" providerId="ADAL" clId="{20734E0D-FF75-44B1-9DFF-D19DBB4D069A}" dt="2026-07-29T15:38:20.693" v="63" actId="478"/>
+          <ac:spMkLst>
+            <pc:docMk/>
+            <pc:sldMk cId="0" sldId="259"/>
+            <ac:spMk id="2" creationId="{00000000-0000-0000-0000-000000000000}"/>
+          </ac:spMkLst>
+        </pc:spChg>
         <pc:spChg chg="del mod">
           <ac:chgData name="Rodrigue YENGO" userId="9019d928-c12d-48de-bdb2-52a833805ac2" providerId="ADAL" clId="{20734E0D-FF75-44B1-9DFF-D19DBB4D069A}" dt="2026-07-28T13:58:07.238" v="40" actId="478"/>
           <ac:spMkLst>
@@ -331,6 +427,14 @@
             <ac:spMk id="9" creationId="{00000000-0000-0000-0000-000000000000}"/>
           </ac:spMkLst>
         </pc:spChg>
+        <pc:picChg chg="del">
+          <ac:chgData name="Rodrigue YENGO" userId="9019d928-c12d-48de-bdb2-52a833805ac2" providerId="ADAL" clId="{20734E0D-FF75-44B1-9DFF-D19DBB4D069A}" dt="2026-07-29T15:38:23.837" v="64" actId="478"/>
+          <ac:picMkLst>
+            <pc:docMk/>
+            <pc:sldMk cId="0" sldId="259"/>
+            <ac:picMk id="11" creationId="{00000000-0000-0000-0000-000000000000}"/>
+          </ac:picMkLst>
+        </pc:picChg>
       </pc:sldChg>
       <pc:sldChg chg="delSp modSp mod">
         <pc:chgData name="Rodrigue YENGO" userId="9019d928-c12d-48de-bdb2-52a833805ac2" providerId="ADAL" clId="{20734E0D-FF75-44B1-9DFF-D19DBB4D069A}" dt="2026-07-28T13:58:16.917" v="41" actId="478"/>
@@ -356,11 +460,19 @@
         </pc:spChg>
       </pc:sldChg>
       <pc:sldChg chg="delSp modSp mod">
-        <pc:chgData name="Rodrigue YENGO" userId="9019d928-c12d-48de-bdb2-52a833805ac2" providerId="ADAL" clId="{20734E0D-FF75-44B1-9DFF-D19DBB4D069A}" dt="2026-07-28T13:58:39.787" v="42" actId="478"/>
+        <pc:chgData name="Rodrigue YENGO" userId="9019d928-c12d-48de-bdb2-52a833805ac2" providerId="ADAL" clId="{20734E0D-FF75-44B1-9DFF-D19DBB4D069A}" dt="2026-07-29T15:38:32.575" v="66" actId="478"/>
         <pc:sldMkLst>
           <pc:docMk/>
           <pc:sldMk cId="0" sldId="261"/>
         </pc:sldMkLst>
+        <pc:spChg chg="del">
+          <ac:chgData name="Rodrigue YENGO" userId="9019d928-c12d-48de-bdb2-52a833805ac2" providerId="ADAL" clId="{20734E0D-FF75-44B1-9DFF-D19DBB4D069A}" dt="2026-07-29T15:38:29.611" v="65" actId="478"/>
+          <ac:spMkLst>
+            <pc:docMk/>
+            <pc:sldMk cId="0" sldId="261"/>
+            <ac:spMk id="2" creationId="{00000000-0000-0000-0000-000000000000}"/>
+          </ac:spMkLst>
+        </pc:spChg>
         <pc:spChg chg="del mod">
           <ac:chgData name="Rodrigue YENGO" userId="9019d928-c12d-48de-bdb2-52a833805ac2" providerId="ADAL" clId="{20734E0D-FF75-44B1-9DFF-D19DBB4D069A}" dt="2026-07-28T13:58:39.787" v="42" actId="478"/>
           <ac:spMkLst>
@@ -385,13 +497,29 @@
             <ac:spMk id="5" creationId="{00000000-0000-0000-0000-000000000000}"/>
           </ac:spMkLst>
         </pc:spChg>
+        <pc:picChg chg="del">
+          <ac:chgData name="Rodrigue YENGO" userId="9019d928-c12d-48de-bdb2-52a833805ac2" providerId="ADAL" clId="{20734E0D-FF75-44B1-9DFF-D19DBB4D069A}" dt="2026-07-29T15:38:32.575" v="66" actId="478"/>
+          <ac:picMkLst>
+            <pc:docMk/>
+            <pc:sldMk cId="0" sldId="261"/>
+            <ac:picMk id="14" creationId="{00000000-0000-0000-0000-000000000000}"/>
+          </ac:picMkLst>
+        </pc:picChg>
       </pc:sldChg>
       <pc:sldChg chg="delSp modSp mod">
-        <pc:chgData name="Rodrigue YENGO" userId="9019d928-c12d-48de-bdb2-52a833805ac2" providerId="ADAL" clId="{20734E0D-FF75-44B1-9DFF-D19DBB4D069A}" dt="2026-07-28T13:58:49.791" v="43" actId="478"/>
+        <pc:chgData name="Rodrigue YENGO" userId="9019d928-c12d-48de-bdb2-52a833805ac2" providerId="ADAL" clId="{20734E0D-FF75-44B1-9DFF-D19DBB4D069A}" dt="2026-07-29T15:38:48.790" v="68" actId="478"/>
         <pc:sldMkLst>
           <pc:docMk/>
           <pc:sldMk cId="0" sldId="262"/>
         </pc:sldMkLst>
+        <pc:spChg chg="del">
+          <ac:chgData name="Rodrigue YENGO" userId="9019d928-c12d-48de-bdb2-52a833805ac2" providerId="ADAL" clId="{20734E0D-FF75-44B1-9DFF-D19DBB4D069A}" dt="2026-07-29T15:38:45.269" v="67" actId="478"/>
+          <ac:spMkLst>
+            <pc:docMk/>
+            <pc:sldMk cId="0" sldId="262"/>
+            <ac:spMk id="2" creationId="{00000000-0000-0000-0000-000000000000}"/>
+          </ac:spMkLst>
+        </pc:spChg>
         <pc:spChg chg="del mod">
           <ac:chgData name="Rodrigue YENGO" userId="9019d928-c12d-48de-bdb2-52a833805ac2" providerId="ADAL" clId="{20734E0D-FF75-44B1-9DFF-D19DBB4D069A}" dt="2026-07-28T13:58:49.791" v="43" actId="478"/>
           <ac:spMkLst>
@@ -408,13 +536,29 @@
             <ac:spMk id="4" creationId="{00000000-0000-0000-0000-000000000000}"/>
           </ac:spMkLst>
         </pc:spChg>
+        <pc:picChg chg="del">
+          <ac:chgData name="Rodrigue YENGO" userId="9019d928-c12d-48de-bdb2-52a833805ac2" providerId="ADAL" clId="{20734E0D-FF75-44B1-9DFF-D19DBB4D069A}" dt="2026-07-29T15:38:48.790" v="68" actId="478"/>
+          <ac:picMkLst>
+            <pc:docMk/>
+            <pc:sldMk cId="0" sldId="262"/>
+            <ac:picMk id="6" creationId="{00000000-0000-0000-0000-000000000000}"/>
+          </ac:picMkLst>
+        </pc:picChg>
       </pc:sldChg>
-      <pc:sldChg chg="modSp mod">
-        <pc:chgData name="Rodrigue YENGO" userId="9019d928-c12d-48de-bdb2-52a833805ac2" providerId="ADAL" clId="{20734E0D-FF75-44B1-9DFF-D19DBB4D069A}" dt="2026-07-28T13:47:16.327" v="28" actId="27636"/>
+      <pc:sldChg chg="delSp modSp mod">
+        <pc:chgData name="Rodrigue YENGO" userId="9019d928-c12d-48de-bdb2-52a833805ac2" providerId="ADAL" clId="{20734E0D-FF75-44B1-9DFF-D19DBB4D069A}" dt="2026-07-29T15:38:52.316" v="69" actId="478"/>
         <pc:sldMkLst>
           <pc:docMk/>
           <pc:sldMk cId="0" sldId="263"/>
         </pc:sldMkLst>
+        <pc:spChg chg="del">
+          <ac:chgData name="Rodrigue YENGO" userId="9019d928-c12d-48de-bdb2-52a833805ac2" providerId="ADAL" clId="{20734E0D-FF75-44B1-9DFF-D19DBB4D069A}" dt="2026-07-29T15:38:52.316" v="69" actId="478"/>
+          <ac:spMkLst>
+            <pc:docMk/>
+            <pc:sldMk cId="0" sldId="263"/>
+            <ac:spMk id="2" creationId="{00000000-0000-0000-0000-000000000000}"/>
+          </ac:spMkLst>
+        </pc:spChg>
         <pc:spChg chg="mod">
           <ac:chgData name="Rodrigue YENGO" userId="9019d928-c12d-48de-bdb2-52a833805ac2" providerId="ADAL" clId="{20734E0D-FF75-44B1-9DFF-D19DBB4D069A}" dt="2026-07-28T13:47:16.326" v="27" actId="27636"/>
           <ac:spMkLst>
@@ -433,7 +577,7 @@
         </pc:spChg>
       </pc:sldChg>
       <pc:sldMasterChg chg="addSp delSp modSp mod modSldLayout">
-        <pc:chgData name="Rodrigue YENGO" userId="9019d928-c12d-48de-bdb2-52a833805ac2" providerId="ADAL" clId="{20734E0D-FF75-44B1-9DFF-D19DBB4D069A}" dt="2026-07-28T13:57:36.575" v="36" actId="22"/>
+        <pc:chgData name="Rodrigue YENGO" userId="9019d928-c12d-48de-bdb2-52a833805ac2" providerId="ADAL" clId="{20734E0D-FF75-44B1-9DFF-D19DBB4D069A}" dt="2026-07-29T17:03:29.261" v="74" actId="22"/>
         <pc:sldMasterMkLst>
           <pc:docMk/>
           <pc:sldMasterMk cId="0" sldId="2147483648"/>
@@ -447,15 +591,31 @@
           </ac:picMkLst>
         </pc:picChg>
         <pc:picChg chg="add">
-          <ac:chgData name="Rodrigue YENGO" userId="9019d928-c12d-48de-bdb2-52a833805ac2" providerId="ADAL" clId="{20734E0D-FF75-44B1-9DFF-D19DBB4D069A}" dt="2026-07-28T13:49:37.906" v="31" actId="22"/>
+          <ac:chgData name="Rodrigue YENGO" userId="9019d928-c12d-48de-bdb2-52a833805ac2" providerId="ADAL" clId="{20734E0D-FF75-44B1-9DFF-D19DBB4D069A}" dt="2026-07-29T15:53:55.590" v="71" actId="22"/>
+          <ac:picMkLst>
+            <pc:docMk/>
+            <pc:sldMasterMk cId="0" sldId="2147483648"/>
+            <ac:picMk id="3" creationId="{0FC14F3A-B351-0A22-9952-FAE71CE094D1}"/>
+          </ac:picMkLst>
+        </pc:picChg>
+        <pc:picChg chg="add">
+          <ac:chgData name="Rodrigue YENGO" userId="9019d928-c12d-48de-bdb2-52a833805ac2" providerId="ADAL" clId="{20734E0D-FF75-44B1-9DFF-D19DBB4D069A}" dt="2026-07-29T17:03:29.261" v="74" actId="22"/>
+          <ac:picMkLst>
+            <pc:docMk/>
+            <pc:sldMasterMk cId="0" sldId="2147483648"/>
+            <ac:picMk id="4" creationId="{4E5533CB-2C09-F168-90E2-155B385C2D7B}"/>
+          </ac:picMkLst>
+        </pc:picChg>
+        <pc:picChg chg="add del">
+          <ac:chgData name="Rodrigue YENGO" userId="9019d928-c12d-48de-bdb2-52a833805ac2" providerId="ADAL" clId="{20734E0D-FF75-44B1-9DFF-D19DBB4D069A}" dt="2026-07-29T15:53:54.887" v="70" actId="478"/>
           <ac:picMkLst>
             <pc:docMk/>
             <pc:sldMasterMk cId="0" sldId="2147483648"/>
             <ac:picMk id="4" creationId="{CD4108F0-B8E6-221A-B789-E4210A32BA95}"/>
           </ac:picMkLst>
         </pc:picChg>
-        <pc:sldLayoutChg chg="addSp mod">
-          <pc:chgData name="Rodrigue YENGO" userId="9019d928-c12d-48de-bdb2-52a833805ac2" providerId="ADAL" clId="{20734E0D-FF75-44B1-9DFF-D19DBB4D069A}" dt="2026-07-28T13:57:36.575" v="36" actId="22"/>
+        <pc:sldLayoutChg chg="addSp delSp modSp mod setBg">
+          <pc:chgData name="Rodrigue YENGO" userId="9019d928-c12d-48de-bdb2-52a833805ac2" providerId="ADAL" clId="{20734E0D-FF75-44B1-9DFF-D19DBB4D069A}" dt="2026-07-29T17:03:27.264" v="73" actId="478"/>
           <pc:sldLayoutMkLst>
             <pc:docMk/>
             <pc:sldMasterMk cId="0" sldId="2147483648"/>
@@ -470,6 +630,42 @@
               <ac:spMk id="3" creationId="{423FB073-6BC6-3F6E-E2A6-F4C62493679B}"/>
             </ac:spMkLst>
           </pc:spChg>
+          <pc:spChg chg="add mod">
+            <ac:chgData name="Rodrigue YENGO" userId="9019d928-c12d-48de-bdb2-52a833805ac2" providerId="ADAL" clId="{20734E0D-FF75-44B1-9DFF-D19DBB4D069A}" dt="2026-07-29T15:37:17.875" v="57" actId="14100"/>
+            <ac:spMkLst>
+              <pc:docMk/>
+              <pc:sldMasterMk cId="0" sldId="2147483648"/>
+              <pc:sldLayoutMk cId="0" sldId="2147483649"/>
+              <ac:spMk id="4" creationId="{2988895D-BE97-157E-13F2-B077A0179677}"/>
+            </ac:spMkLst>
+          </pc:spChg>
+          <pc:spChg chg="add mod">
+            <ac:chgData name="Rodrigue YENGO" userId="9019d928-c12d-48de-bdb2-52a833805ac2" providerId="ADAL" clId="{20734E0D-FF75-44B1-9DFF-D19DBB4D069A}" dt="2026-07-29T15:37:17.875" v="57" actId="14100"/>
+            <ac:spMkLst>
+              <pc:docMk/>
+              <pc:sldMasterMk cId="0" sldId="2147483648"/>
+              <pc:sldLayoutMk cId="0" sldId="2147483649"/>
+              <ac:spMk id="6" creationId="{75A91390-FBEA-D540-9308-EA21F3A070D2}"/>
+            </ac:spMkLst>
+          </pc:spChg>
+          <pc:spChg chg="add mod">
+            <ac:chgData name="Rodrigue YENGO" userId="9019d928-c12d-48de-bdb2-52a833805ac2" providerId="ADAL" clId="{20734E0D-FF75-44B1-9DFF-D19DBB4D069A}" dt="2026-07-29T15:37:17.875" v="57" actId="14100"/>
+            <ac:spMkLst>
+              <pc:docMk/>
+              <pc:sldMasterMk cId="0" sldId="2147483648"/>
+              <pc:sldLayoutMk cId="0" sldId="2147483649"/>
+              <ac:spMk id="8" creationId="{29759D1A-70E8-10FB-4A07-8D67C3AF060C}"/>
+            </ac:spMkLst>
+          </pc:spChg>
+          <pc:picChg chg="add del">
+            <ac:chgData name="Rodrigue YENGO" userId="9019d928-c12d-48de-bdb2-52a833805ac2" providerId="ADAL" clId="{20734E0D-FF75-44B1-9DFF-D19DBB4D069A}" dt="2026-07-29T17:03:27.264" v="73" actId="478"/>
+            <ac:picMkLst>
+              <pc:docMk/>
+              <pc:sldMasterMk cId="0" sldId="2147483648"/>
+              <pc:sldLayoutMk cId="0" sldId="2147483649"/>
+              <ac:picMk id="5" creationId="{D146C63A-387F-5665-5341-CDE0691A0858}"/>
+            </ac:picMkLst>
+          </pc:picChg>
         </pc:sldLayoutChg>
       </pc:sldMasterChg>
     </pc:docChg>
@@ -1355,10 +1551,166 @@
           </a:p>
         </p:txBody>
       </p:sp>
+      <p:sp>
+        <p:nvSpPr>
+          <p:cNvPr id="4" name="Text 4">
+            <a:extLst>
+              <a:ext uri="{FF2B5EF4-FFF2-40B4-BE49-F238E27FC236}">
+                <a16:creationId xmlns:a16="http://schemas.microsoft.com/office/drawing/2014/main" id="{2988895D-BE97-157E-13F2-B077A0179677}"/>
+              </a:ext>
+            </a:extLst>
+          </p:cNvPr>
+          <p:cNvSpPr/>
+          <p:nvPr userDrawn="1"/>
+        </p:nvSpPr>
+        <p:spPr>
+          <a:xfrm>
+            <a:off x="1143000" y="9296400"/>
+            <a:ext cx="3245078" cy="504092"/>
+          </a:xfrm>
+          <a:prstGeom prst="rect">
+            <a:avLst/>
+          </a:prstGeom>
+          <a:noFill/>
+          <a:ln/>
+        </p:spPr>
+        <p:txBody>
+          <a:bodyPr wrap="square" lIns="25400" tIns="25400" rIns="25400" bIns="25400" rtlCol="0" anchor="t">
+            <a:noAutofit/>
+          </a:bodyPr>
+          <a:lstStyle/>
+          <a:p>
+            <a:pPr marL="0" indent="0" algn="l">
+              <a:lnSpc>
+                <a:spcPct val="131154"/>
+              </a:lnSpc>
+              <a:buNone/>
+            </a:pPr>
+            <a:r>
+              <a:rPr lang="en-US" sz="1400" dirty="0">
+                <a:solidFill>
+                  <a:srgbClr val="E9E9ED">
+                    <a:alpha val="55000"/>
+                  </a:srgbClr>
+                </a:solidFill>
+                <a:latin typeface="Arial" pitchFamily="34" charset="0"/>
+                <a:ea typeface="Arial" pitchFamily="34" charset="-122"/>
+                <a:cs typeface="Arial" pitchFamily="34" charset="-120"/>
+              </a:rPr>
+              <a:t>Data &amp; AI France Study Group</a:t>
+            </a:r>
+            <a:endParaRPr lang="en-US" sz="1400" dirty="0"/>
+          </a:p>
+        </p:txBody>
+      </p:sp>
+      <p:sp>
+        <p:nvSpPr>
+          <p:cNvPr id="6" name="Text 5">
+            <a:extLst>
+              <a:ext uri="{FF2B5EF4-FFF2-40B4-BE49-F238E27FC236}">
+                <a16:creationId xmlns:a16="http://schemas.microsoft.com/office/drawing/2014/main" id="{75A91390-FBEA-D540-9308-EA21F3A070D2}"/>
+              </a:ext>
+            </a:extLst>
+          </p:cNvPr>
+          <p:cNvSpPr/>
+          <p:nvPr userDrawn="1"/>
+        </p:nvSpPr>
+        <p:spPr>
+          <a:xfrm>
+            <a:off x="4264521" y="9296400"/>
+            <a:ext cx="136624" cy="504092"/>
+          </a:xfrm>
+          <a:prstGeom prst="rect">
+            <a:avLst/>
+          </a:prstGeom>
+          <a:noFill/>
+          <a:ln/>
+        </p:spPr>
+        <p:txBody>
+          <a:bodyPr wrap="square" lIns="25400" tIns="25400" rIns="25400" bIns="25400" rtlCol="0" anchor="t">
+            <a:noAutofit/>
+          </a:bodyPr>
+          <a:lstStyle/>
+          <a:p>
+            <a:pPr marL="0" indent="0" algn="l">
+              <a:lnSpc>
+                <a:spcPct val="131154"/>
+              </a:lnSpc>
+              <a:buNone/>
+            </a:pPr>
+            <a:r>
+              <a:rPr lang="en-US" sz="1400" dirty="0">
+                <a:solidFill>
+                  <a:srgbClr val="E9E9ED">
+                    <a:alpha val="55000"/>
+                  </a:srgbClr>
+                </a:solidFill>
+                <a:latin typeface="Arial" pitchFamily="34" charset="0"/>
+                <a:ea typeface="Arial" pitchFamily="34" charset="-122"/>
+                <a:cs typeface="Arial" pitchFamily="34" charset="-120"/>
+              </a:rPr>
+              <a:t>·</a:t>
+            </a:r>
+            <a:endParaRPr lang="en-US" sz="1400" dirty="0"/>
+          </a:p>
+        </p:txBody>
+      </p:sp>
+      <p:sp>
+        <p:nvSpPr>
+          <p:cNvPr id="8" name="Text 6">
+            <a:extLst>
+              <a:ext uri="{FF2B5EF4-FFF2-40B4-BE49-F238E27FC236}">
+                <a16:creationId xmlns:a16="http://schemas.microsoft.com/office/drawing/2014/main" id="{29759D1A-70E8-10FB-4A07-8D67C3AF060C}"/>
+              </a:ext>
+            </a:extLst>
+          </p:cNvPr>
+          <p:cNvSpPr/>
+          <p:nvPr userDrawn="1"/>
+        </p:nvSpPr>
+        <p:spPr>
+          <a:xfrm>
+            <a:off x="4496395" y="9296400"/>
+            <a:ext cx="2313072" cy="504092"/>
+          </a:xfrm>
+          <a:prstGeom prst="rect">
+            <a:avLst/>
+          </a:prstGeom>
+          <a:noFill/>
+          <a:ln/>
+        </p:spPr>
+        <p:txBody>
+          <a:bodyPr wrap="square" lIns="25400" tIns="25400" rIns="25400" bIns="25400" rtlCol="0" anchor="t">
+            <a:noAutofit/>
+          </a:bodyPr>
+          <a:lstStyle/>
+          <a:p>
+            <a:pPr marL="0" indent="0" algn="l">
+              <a:lnSpc>
+                <a:spcPct val="131154"/>
+              </a:lnSpc>
+              <a:buNone/>
+            </a:pPr>
+            <a:r>
+              <a:rPr lang="en-US" sz="1400" dirty="0">
+                <a:solidFill>
+                  <a:srgbClr val="E9E9ED">
+                    <a:alpha val="55000"/>
+                  </a:srgbClr>
+                </a:solidFill>
+                <a:latin typeface="Arial" pitchFamily="34" charset="0"/>
+                <a:ea typeface="Arial" pitchFamily="34" charset="-122"/>
+                <a:cs typeface="Arial" pitchFamily="34" charset="-120"/>
+              </a:rPr>
+              <a:t>Data Days — DP-800</a:t>
+            </a:r>
+            <a:endParaRPr lang="en-US" sz="1400" dirty="0"/>
+          </a:p>
+        </p:txBody>
+      </p:sp>
     </p:spTree>
   </p:cSld>
   <p:clrMapOvr>
-    <a:masterClrMapping/>
+    <a:overrideClrMapping bg1="dk1" tx1="lt1" bg2="dk2" tx2="lt2" accent1="accent1" accent2="accent2" accent3="accent3" accent4="accent4" accent5="accent5" accent6="accent6" hlink="hlink" folHlink="folHlink"/>
   </p:clrMapOvr>
 </p:sldLayout>
 </file>
@@ -1387,10 +1739,10 @@
       </p:grpSpPr>
       <p:pic>
         <p:nvPicPr>
-          <p:cNvPr id="4" name="Image 3">
+          <p:cNvPr id="3" name="Image 2">
             <a:extLst>
               <a:ext uri="{FF2B5EF4-FFF2-40B4-BE49-F238E27FC236}">
-                <a16:creationId xmlns:a16="http://schemas.microsoft.com/office/drawing/2014/main" id="{CD4108F0-B8E6-221A-B789-E4210A32BA95}"/>
+                <a16:creationId xmlns:a16="http://schemas.microsoft.com/office/drawing/2014/main" id="{0FC14F3A-B351-0A22-9952-FAE71CE094D1}"/>
               </a:ext>
             </a:extLst>
           </p:cNvPr>
@@ -1407,8 +1759,38 @@
         </p:blipFill>
         <p:spPr>
           <a:xfrm>
-            <a:off x="16205200" y="194732"/>
-            <a:ext cx="2222500" cy="1481667"/>
+            <a:off x="16732737" y="194733"/>
+            <a:ext cx="1694962" cy="1129975"/>
+          </a:xfrm>
+          <a:prstGeom prst="rect">
+            <a:avLst/>
+          </a:prstGeom>
+        </p:spPr>
+      </p:pic>
+      <p:pic>
+        <p:nvPicPr>
+          <p:cNvPr id="4" name="Image 3">
+            <a:extLst>
+              <a:ext uri="{FF2B5EF4-FFF2-40B4-BE49-F238E27FC236}">
+                <a16:creationId xmlns:a16="http://schemas.microsoft.com/office/drawing/2014/main" id="{4E5533CB-2C09-F168-90E2-155B385C2D7B}"/>
+              </a:ext>
+            </a:extLst>
+          </p:cNvPr>
+          <p:cNvPicPr>
+            <a:picLocks noChangeAspect="1"/>
+          </p:cNvPicPr>
+          <p:nvPr userDrawn="1"/>
+        </p:nvPicPr>
+        <p:blipFill>
+          <a:blip r:embed="rId4"/>
+          <a:stretch>
+            <a:fillRect/>
+          </a:stretch>
+        </p:blipFill>
+        <p:spPr>
+          <a:xfrm>
+            <a:off x="468959" y="7407996"/>
+            <a:ext cx="5111262" cy="3407508"/>
           </a:xfrm>
           <a:prstGeom prst="rect">
             <a:avLst/>
@@ -1702,47 +2084,6 @@
       </p:grpSpPr>
       <p:sp>
         <p:nvSpPr>
-          <p:cNvPr id="2" name="Shape 0"/>
-          <p:cNvSpPr/>
-          <p:nvPr/>
-        </p:nvSpPr>
-        <p:spPr>
-          <a:xfrm>
-            <a:off x="17253" y="0"/>
-            <a:ext cx="18288000" cy="10287000"/>
-          </a:xfrm>
-          <a:prstGeom prst="rect">
-            <a:avLst/>
-          </a:prstGeom>
-          <a:gradFill rotWithShape="1">
-            <a:gsLst>
-              <a:gs pos="0">
-                <a:srgbClr val="2B2741">
-                  <a:alpha val="75000"/>
-                </a:srgbClr>
-              </a:gs>
-              <a:gs pos="58000">
-                <a:srgbClr val="2B2741">
-                  <a:alpha val="0"/>
-                </a:srgbClr>
-              </a:gs>
-            </a:gsLst>
-            <a:path path="circle">
-              <a:fillToRect l="80000" r="20000" b="100000"/>
-            </a:path>
-          </a:gradFill>
-          <a:ln/>
-        </p:spPr>
-        <p:txBody>
-          <a:bodyPr/>
-          <a:lstStyle/>
-          <a:p>
-            <a:endParaRPr lang="en-GB" dirty="0"/>
-          </a:p>
-        </p:txBody>
-      </p:sp>
-      <p:sp>
-        <p:nvSpPr>
           <p:cNvPr id="4" name="Text 2"/>
           <p:cNvSpPr/>
           <p:nvPr/>
@@ -1829,144 +2170,240 @@
           </a:p>
         </p:txBody>
       </p:sp>
-      <p:sp>
-        <p:nvSpPr>
-          <p:cNvPr id="6" name="Text 4"/>
-          <p:cNvSpPr/>
+      <p:grpSp>
+        <p:nvGrpSpPr>
+          <p:cNvPr id="3" name="Groupe 2">
+            <a:extLst>
+              <a:ext uri="{FF2B5EF4-FFF2-40B4-BE49-F238E27FC236}">
+                <a16:creationId xmlns:a16="http://schemas.microsoft.com/office/drawing/2014/main" id="{A21843AA-C9EA-CBC8-3314-15BF01F62D60}"/>
+              </a:ext>
+            </a:extLst>
+          </p:cNvPr>
+          <p:cNvGrpSpPr/>
           <p:nvPr/>
-        </p:nvSpPr>
-        <p:spPr>
+        </p:nvGrpSpPr>
+        <p:grpSpPr>
           <a:xfrm>
-            <a:off x="1143000" y="9296400"/>
-            <a:ext cx="3245078" cy="190500"/>
+            <a:off x="10310563" y="561196"/>
+            <a:ext cx="6990490" cy="8735204"/>
+            <a:chOff x="11002220" y="561196"/>
+            <a:chExt cx="6990490" cy="8735204"/>
           </a:xfrm>
-          <a:prstGeom prst="rect">
-            <a:avLst/>
-          </a:prstGeom>
-          <a:noFill/>
-          <a:ln/>
-        </p:spPr>
-        <p:txBody>
-          <a:bodyPr wrap="square" lIns="25400" tIns="25400" rIns="25400" bIns="25400" rtlCol="0" anchor="t">
-            <a:normAutofit fontScale="47500" lnSpcReduction="20000"/>
-          </a:bodyPr>
-          <a:lstStyle/>
-          <a:p>
-            <a:pPr marL="0" indent="0" algn="l">
-              <a:lnSpc>
-                <a:spcPct val="131154"/>
-              </a:lnSpc>
-              <a:buNone/>
-            </a:pPr>
-            <a:r>
-              <a:rPr lang="en-US" sz="1650" dirty="0">
-                <a:solidFill>
-                  <a:srgbClr val="E9E9ED">
-                    <a:alpha val="55000"/>
-                  </a:srgbClr>
-                </a:solidFill>
-                <a:latin typeface="Arial" pitchFamily="34" charset="0"/>
-                <a:ea typeface="Arial" pitchFamily="34" charset="-122"/>
-                <a:cs typeface="Arial" pitchFamily="34" charset="-120"/>
-              </a:rPr>
-              <a:t>Data &amp; AI France Study Group</a:t>
-            </a:r>
-            <a:endParaRPr lang="en-US" sz="1650" dirty="0"/>
-          </a:p>
-        </p:txBody>
-      </p:sp>
-      <p:sp>
-        <p:nvSpPr>
-          <p:cNvPr id="7" name="Text 5"/>
-          <p:cNvSpPr/>
-          <p:nvPr/>
-        </p:nvSpPr>
-        <p:spPr>
-          <a:xfrm>
-            <a:off x="4264521" y="9296400"/>
-            <a:ext cx="136624" cy="190500"/>
-          </a:xfrm>
-          <a:prstGeom prst="rect">
-            <a:avLst/>
-          </a:prstGeom>
-          <a:noFill/>
-          <a:ln/>
-        </p:spPr>
-        <p:txBody>
-          <a:bodyPr wrap="square" lIns="25400" tIns="25400" rIns="25400" bIns="25400" rtlCol="0" anchor="t">
-            <a:normAutofit fontScale="47500" lnSpcReduction="20000"/>
-          </a:bodyPr>
-          <a:lstStyle/>
-          <a:p>
-            <a:pPr marL="0" indent="0" algn="l">
-              <a:lnSpc>
-                <a:spcPct val="131154"/>
-              </a:lnSpc>
-              <a:buNone/>
-            </a:pPr>
-            <a:r>
-              <a:rPr lang="en-US" sz="1650" dirty="0">
-                <a:solidFill>
-                  <a:srgbClr val="E9E9ED">
-                    <a:alpha val="55000"/>
-                  </a:srgbClr>
-                </a:solidFill>
-                <a:latin typeface="Arial" pitchFamily="34" charset="0"/>
-                <a:ea typeface="Arial" pitchFamily="34" charset="-122"/>
-                <a:cs typeface="Arial" pitchFamily="34" charset="-120"/>
-              </a:rPr>
-              <a:t>·</a:t>
-            </a:r>
-            <a:endParaRPr lang="en-US" sz="1650" dirty="0"/>
-          </a:p>
-        </p:txBody>
-      </p:sp>
-      <p:sp>
-        <p:nvSpPr>
-          <p:cNvPr id="8" name="Text 6"/>
-          <p:cNvSpPr/>
-          <p:nvPr/>
-        </p:nvSpPr>
-        <p:spPr>
-          <a:xfrm>
-            <a:off x="4496395" y="9296400"/>
-            <a:ext cx="2313072" cy="190500"/>
-          </a:xfrm>
-          <a:prstGeom prst="rect">
-            <a:avLst/>
-          </a:prstGeom>
-          <a:noFill/>
-          <a:ln/>
-        </p:spPr>
-        <p:txBody>
-          <a:bodyPr wrap="square" lIns="25400" tIns="25400" rIns="25400" bIns="25400" rtlCol="0" anchor="t">
-            <a:normAutofit fontScale="47500" lnSpcReduction="20000"/>
-          </a:bodyPr>
-          <a:lstStyle/>
-          <a:p>
-            <a:pPr marL="0" indent="0" algn="l">
-              <a:lnSpc>
-                <a:spcPct val="131154"/>
-              </a:lnSpc>
-              <a:buNone/>
-            </a:pPr>
-            <a:r>
-              <a:rPr lang="en-US" sz="1650" dirty="0">
-                <a:solidFill>
-                  <a:srgbClr val="E9E9ED">
-                    <a:alpha val="55000"/>
-                  </a:srgbClr>
-                </a:solidFill>
-                <a:latin typeface="Arial" pitchFamily="34" charset="0"/>
-                <a:ea typeface="Arial" pitchFamily="34" charset="-122"/>
-                <a:cs typeface="Arial" pitchFamily="34" charset="-120"/>
-              </a:rPr>
-              <a:t>Data Days — DP-800</a:t>
-            </a:r>
-            <a:endParaRPr lang="en-US" sz="1650" dirty="0"/>
-          </a:p>
-        </p:txBody>
-      </p:sp>
+        </p:grpSpPr>
+        <p:pic>
+          <p:nvPicPr>
+            <p:cNvPr id="9" name="Image 8">
+              <a:extLst>
+                <a:ext uri="{FF2B5EF4-FFF2-40B4-BE49-F238E27FC236}">
+                  <a16:creationId xmlns:a16="http://schemas.microsoft.com/office/drawing/2014/main" id="{91AD9F1A-52A5-1EA5-6FFF-F19291532B95}"/>
+                </a:ext>
+              </a:extLst>
+            </p:cNvPr>
+            <p:cNvPicPr>
+              <a:picLocks noChangeAspect="1"/>
+            </p:cNvPicPr>
+            <p:nvPr/>
+          </p:nvPicPr>
+          <p:blipFill>
+            <a:blip r:embed="rId3"/>
+            <a:stretch>
+              <a:fillRect/>
+            </a:stretch>
+          </p:blipFill>
+          <p:spPr>
+            <a:xfrm>
+              <a:off x="11002220" y="4636074"/>
+              <a:ext cx="6990490" cy="4660326"/>
+            </a:xfrm>
+            <a:prstGeom prst="rect">
+              <a:avLst/>
+            </a:prstGeom>
+          </p:spPr>
+        </p:pic>
+        <p:pic>
+          <p:nvPicPr>
+            <p:cNvPr id="10" name="Image 9">
+              <a:extLst>
+                <a:ext uri="{FF2B5EF4-FFF2-40B4-BE49-F238E27FC236}">
+                  <a16:creationId xmlns:a16="http://schemas.microsoft.com/office/drawing/2014/main" id="{F8E1D38C-92C0-92E1-C3D8-A2EB11E54284}"/>
+                </a:ext>
+              </a:extLst>
+            </p:cNvPr>
+            <p:cNvPicPr>
+              <a:picLocks noChangeAspect="1"/>
+            </p:cNvPicPr>
+            <p:nvPr/>
+          </p:nvPicPr>
+          <p:blipFill>
+            <a:blip r:embed="rId4"/>
+            <a:stretch>
+              <a:fillRect/>
+            </a:stretch>
+          </p:blipFill>
+          <p:spPr>
+            <a:xfrm>
+              <a:off x="14823713" y="565257"/>
+              <a:ext cx="2808967" cy="2808967"/>
+            </a:xfrm>
+            <a:prstGeom prst="ellipse">
+              <a:avLst/>
+            </a:prstGeom>
+            <a:ln w="3175" cap="rnd">
+              <a:solidFill>
+                <a:srgbClr val="C8C6BD"/>
+              </a:solidFill>
+              <a:prstDash val="solid"/>
+            </a:ln>
+            <a:effectLst>
+              <a:outerShdw blurRad="127000" algn="bl" rotWithShape="0">
+                <a:srgbClr val="000000"/>
+              </a:outerShdw>
+            </a:effectLst>
+            <a:scene3d>
+              <a:camera prst="perspectiveFront" fov="5400000"/>
+              <a:lightRig rig="threePt" dir="t">
+                <a:rot lat="0" lon="0" rev="19200000"/>
+              </a:lightRig>
+            </a:scene3d>
+            <a:sp3d extrusionH="25400">
+              <a:bevelT w="304800" h="152400" prst="hardEdge"/>
+              <a:extrusionClr>
+                <a:srgbClr val="000000"/>
+              </a:extrusionClr>
+            </a:sp3d>
+          </p:spPr>
+        </p:pic>
+        <p:pic>
+          <p:nvPicPr>
+            <p:cNvPr id="11" name="Image 10">
+              <a:extLst>
+                <a:ext uri="{FF2B5EF4-FFF2-40B4-BE49-F238E27FC236}">
+                  <a16:creationId xmlns:a16="http://schemas.microsoft.com/office/drawing/2014/main" id="{6616A417-C903-2C12-755B-5CED86B9E35F}"/>
+                </a:ext>
+              </a:extLst>
+            </p:cNvPr>
+            <p:cNvPicPr>
+              <a:picLocks noChangeAspect="1"/>
+            </p:cNvPicPr>
+            <p:nvPr/>
+          </p:nvPicPr>
+          <p:blipFill>
+            <a:blip r:embed="rId5"/>
+            <a:stretch>
+              <a:fillRect/>
+            </a:stretch>
+          </p:blipFill>
+          <p:spPr>
+            <a:xfrm>
+              <a:off x="11636328" y="561196"/>
+              <a:ext cx="2807208" cy="2807208"/>
+            </a:xfrm>
+            <a:prstGeom prst="ellipse">
+              <a:avLst/>
+            </a:prstGeom>
+            <a:ln w="3175" cap="rnd">
+              <a:solidFill>
+                <a:srgbClr val="C8C6BD"/>
+              </a:solidFill>
+              <a:prstDash val="solid"/>
+            </a:ln>
+            <a:effectLst>
+              <a:outerShdw blurRad="127000" algn="bl" rotWithShape="0">
+                <a:srgbClr val="000000"/>
+              </a:outerShdw>
+            </a:effectLst>
+            <a:scene3d>
+              <a:camera prst="perspectiveFront" fov="5400000"/>
+              <a:lightRig rig="threePt" dir="t">
+                <a:rot lat="0" lon="0" rev="19200000"/>
+              </a:lightRig>
+            </a:scene3d>
+            <a:sp3d extrusionH="25400">
+              <a:bevelT w="304800" h="152400" prst="hardEdge"/>
+              <a:extrusionClr>
+                <a:srgbClr val="000000"/>
+              </a:extrusionClr>
+            </a:sp3d>
+          </p:spPr>
+        </p:pic>
+        <p:sp>
+          <p:nvSpPr>
+            <p:cNvPr id="12" name="ZoneTexte 11">
+              <a:extLst>
+                <a:ext uri="{FF2B5EF4-FFF2-40B4-BE49-F238E27FC236}">
+                  <a16:creationId xmlns:a16="http://schemas.microsoft.com/office/drawing/2014/main" id="{4DC04E83-1569-E880-0C07-1F28CC3B9164}"/>
+                </a:ext>
+              </a:extLst>
+            </p:cNvPr>
+            <p:cNvSpPr txBox="1"/>
+            <p:nvPr/>
+          </p:nvSpPr>
+          <p:spPr>
+            <a:xfrm>
+              <a:off x="14889480" y="3668223"/>
+              <a:ext cx="2743200" cy="461665"/>
+            </a:xfrm>
+            <a:prstGeom prst="rect">
+              <a:avLst/>
+            </a:prstGeom>
+            <a:noFill/>
+          </p:spPr>
+          <p:txBody>
+            <a:bodyPr wrap="square">
+              <a:spAutoFit/>
+            </a:bodyPr>
+            <a:lstStyle/>
+            <a:p>
+              <a:pPr lvl="0"/>
+              <a:r>
+                <a:rPr lang="en-US" sz="2400" i="0" kern="1200" dirty="0">
+                  <a:effectLst/>
+                  <a:latin typeface="+mn-lt"/>
+                  <a:ea typeface="+mn-ea"/>
+                  <a:cs typeface="+mn-cs"/>
+                </a:rPr>
+                <a:t>Abdelhak BENYAHIA</a:t>
+              </a:r>
+            </a:p>
+          </p:txBody>
+        </p:sp>
+        <p:sp>
+          <p:nvSpPr>
+            <p:cNvPr id="13" name="ZoneTexte 12">
+              <a:extLst>
+                <a:ext uri="{FF2B5EF4-FFF2-40B4-BE49-F238E27FC236}">
+                  <a16:creationId xmlns:a16="http://schemas.microsoft.com/office/drawing/2014/main" id="{6039C797-7483-0477-9B29-70DE87F3ABAD}"/>
+                </a:ext>
+              </a:extLst>
+            </p:cNvPr>
+            <p:cNvSpPr txBox="1"/>
+            <p:nvPr/>
+          </p:nvSpPr>
+          <p:spPr>
+            <a:xfrm>
+              <a:off x="11668332" y="3668223"/>
+              <a:ext cx="2743200" cy="461665"/>
+            </a:xfrm>
+            <a:prstGeom prst="rect">
+              <a:avLst/>
+            </a:prstGeom>
+            <a:noFill/>
+          </p:spPr>
+          <p:txBody>
+            <a:bodyPr wrap="square">
+              <a:spAutoFit/>
+            </a:bodyPr>
+            <a:lstStyle/>
+            <a:p>
+              <a:pPr lvl="0"/>
+              <a:r>
+                <a:rPr lang="en-US" sz="2400" dirty="0"/>
+                <a:t>Rodrigue YENGO</a:t>
+              </a:r>
+            </a:p>
+          </p:txBody>
+        </p:sp>
+      </p:grpSp>
     </p:spTree>
   </p:cSld>
   <p:clrMapOvr>
@@ -2002,47 +2439,6 @@
       </p:grpSpPr>
       <p:sp>
         <p:nvSpPr>
-          <p:cNvPr id="2" name="Shape 0"/>
-          <p:cNvSpPr/>
-          <p:nvPr/>
-        </p:nvSpPr>
-        <p:spPr>
-          <a:xfrm>
-            <a:off x="0" y="0"/>
-            <a:ext cx="18288000" cy="10287000"/>
-          </a:xfrm>
-          <a:prstGeom prst="rect">
-            <a:avLst/>
-          </a:prstGeom>
-          <a:gradFill rotWithShape="1">
-            <a:gsLst>
-              <a:gs pos="0">
-                <a:srgbClr val="2B2741">
-                  <a:alpha val="75000"/>
-                </a:srgbClr>
-              </a:gs>
-              <a:gs pos="58000">
-                <a:srgbClr val="2B2741">
-                  <a:alpha val="0"/>
-                </a:srgbClr>
-              </a:gs>
-            </a:gsLst>
-            <a:path path="circle">
-              <a:fillToRect l="80000" r="20000" b="100000"/>
-            </a:path>
-          </a:gradFill>
-          <a:ln/>
-        </p:spPr>
-        <p:txBody>
-          <a:bodyPr/>
-          <a:lstStyle/>
-          <a:p>
-            <a:endParaRPr lang="en-GB"/>
-          </a:p>
-        </p:txBody>
-      </p:sp>
-      <p:sp>
-        <p:nvSpPr>
           <p:cNvPr id="4" name="Text 2"/>
           <p:cNvSpPr/>
           <p:nvPr/>
@@ -2437,30 +2833,6 @@
           </a:p>
         </p:txBody>
       </p:sp>
-      <p:pic>
-        <p:nvPicPr>
-          <p:cNvPr id="13" name="Image 0" descr="preencoded.png"/>
-          <p:cNvPicPr>
-            <a:picLocks noChangeAspect="1"/>
-          </p:cNvPicPr>
-          <p:nvPr/>
-        </p:nvPicPr>
-        <p:blipFill>
-          <a:blip r:embed="rId3"/>
-          <a:stretch>
-            <a:fillRect/>
-          </a:stretch>
-        </p:blipFill>
-        <p:spPr>
-          <a:xfrm>
-            <a:off x="11167765" y="9867900"/>
-            <a:ext cx="5977235" cy="152400"/>
-          </a:xfrm>
-          <a:prstGeom prst="rect">
-            <a:avLst/>
-          </a:prstGeom>
-        </p:spPr>
-      </p:pic>
     </p:spTree>
   </p:cSld>
   <p:clrMapOvr>
@@ -2496,47 +2868,6 @@
       </p:grpSpPr>
       <p:sp>
         <p:nvSpPr>
-          <p:cNvPr id="2" name="Shape 0"/>
-          <p:cNvSpPr/>
-          <p:nvPr/>
-        </p:nvSpPr>
-        <p:spPr>
-          <a:xfrm>
-            <a:off x="0" y="0"/>
-            <a:ext cx="18288000" cy="10287000"/>
-          </a:xfrm>
-          <a:prstGeom prst="rect">
-            <a:avLst/>
-          </a:prstGeom>
-          <a:gradFill rotWithShape="1">
-            <a:gsLst>
-              <a:gs pos="0">
-                <a:srgbClr val="2B2741">
-                  <a:alpha val="75000"/>
-                </a:srgbClr>
-              </a:gs>
-              <a:gs pos="58000">
-                <a:srgbClr val="2B2741">
-                  <a:alpha val="0"/>
-                </a:srgbClr>
-              </a:gs>
-            </a:gsLst>
-            <a:path path="circle">
-              <a:fillToRect l="80000" r="20000" b="100000"/>
-            </a:path>
-          </a:gradFill>
-          <a:ln/>
-        </p:spPr>
-        <p:txBody>
-          <a:bodyPr/>
-          <a:lstStyle/>
-          <a:p>
-            <a:endParaRPr lang="en-GB"/>
-          </a:p>
-        </p:txBody>
-      </p:sp>
-      <p:sp>
-        <p:nvSpPr>
           <p:cNvPr id="4" name="Text 2"/>
           <p:cNvSpPr/>
           <p:nvPr/>
@@ -2836,30 +3167,6 @@
           </a:p>
         </p:txBody>
       </p:sp>
-      <p:pic>
-        <p:nvPicPr>
-          <p:cNvPr id="8" name="Image 0" descr="preencoded.png"/>
-          <p:cNvPicPr>
-            <a:picLocks noChangeAspect="1"/>
-          </p:cNvPicPr>
-          <p:nvPr/>
-        </p:nvPicPr>
-        <p:blipFill>
-          <a:blip r:embed="rId3"/>
-          <a:stretch>
-            <a:fillRect/>
-          </a:stretch>
-        </p:blipFill>
-        <p:spPr>
-          <a:xfrm>
-            <a:off x="11167765" y="9867900"/>
-            <a:ext cx="5977235" cy="152400"/>
-          </a:xfrm>
-          <a:prstGeom prst="rect">
-            <a:avLst/>
-          </a:prstGeom>
-        </p:spPr>
-      </p:pic>
     </p:spTree>
   </p:cSld>
   <p:clrMapOvr>
@@ -2895,47 +3202,6 @@
       </p:grpSpPr>
       <p:sp>
         <p:nvSpPr>
-          <p:cNvPr id="2" name="Shape 0"/>
-          <p:cNvSpPr/>
-          <p:nvPr/>
-        </p:nvSpPr>
-        <p:spPr>
-          <a:xfrm>
-            <a:off x="0" y="0"/>
-            <a:ext cx="18288000" cy="10287000"/>
-          </a:xfrm>
-          <a:prstGeom prst="rect">
-            <a:avLst/>
-          </a:prstGeom>
-          <a:gradFill rotWithShape="1">
-            <a:gsLst>
-              <a:gs pos="0">
-                <a:srgbClr val="2B2741">
-                  <a:alpha val="75000"/>
-                </a:srgbClr>
-              </a:gs>
-              <a:gs pos="58000">
-                <a:srgbClr val="2B2741">
-                  <a:alpha val="0"/>
-                </a:srgbClr>
-              </a:gs>
-            </a:gsLst>
-            <a:path path="circle">
-              <a:fillToRect l="80000" r="20000" b="100000"/>
-            </a:path>
-          </a:gradFill>
-          <a:ln/>
-        </p:spPr>
-        <p:txBody>
-          <a:bodyPr/>
-          <a:lstStyle/>
-          <a:p>
-            <a:endParaRPr lang="en-GB"/>
-          </a:p>
-        </p:txBody>
-      </p:sp>
-      <p:sp>
-        <p:nvSpPr>
           <p:cNvPr id="4" name="Text 2"/>
           <p:cNvSpPr/>
           <p:nvPr/>
@@ -3242,30 +3508,6 @@
           </a:p>
         </p:txBody>
       </p:sp>
-      <p:pic>
-        <p:nvPicPr>
-          <p:cNvPr id="11" name="Image 0" descr="preencoded.png"/>
-          <p:cNvPicPr>
-            <a:picLocks noChangeAspect="1"/>
-          </p:cNvPicPr>
-          <p:nvPr/>
-        </p:nvPicPr>
-        <p:blipFill>
-          <a:blip r:embed="rId3"/>
-          <a:stretch>
-            <a:fillRect/>
-          </a:stretch>
-        </p:blipFill>
-        <p:spPr>
-          <a:xfrm>
-            <a:off x="11167765" y="9867900"/>
-            <a:ext cx="5977235" cy="152400"/>
-          </a:xfrm>
-          <a:prstGeom prst="rect">
-            <a:avLst/>
-          </a:prstGeom>
-        </p:spPr>
-      </p:pic>
     </p:spTree>
   </p:cSld>
   <p:clrMapOvr>
@@ -3611,47 +3853,6 @@
       </p:grpSpPr>
       <p:sp>
         <p:nvSpPr>
-          <p:cNvPr id="2" name="Shape 0"/>
-          <p:cNvSpPr/>
-          <p:nvPr/>
-        </p:nvSpPr>
-        <p:spPr>
-          <a:xfrm>
-            <a:off x="0" y="0"/>
-            <a:ext cx="18288000" cy="10287000"/>
-          </a:xfrm>
-          <a:prstGeom prst="rect">
-            <a:avLst/>
-          </a:prstGeom>
-          <a:gradFill rotWithShape="1">
-            <a:gsLst>
-              <a:gs pos="0">
-                <a:srgbClr val="2B2741">
-                  <a:alpha val="75000"/>
-                </a:srgbClr>
-              </a:gs>
-              <a:gs pos="58000">
-                <a:srgbClr val="2B2741">
-                  <a:alpha val="0"/>
-                </a:srgbClr>
-              </a:gs>
-            </a:gsLst>
-            <a:path path="circle">
-              <a:fillToRect l="80000" r="20000" b="100000"/>
-            </a:path>
-          </a:gradFill>
-          <a:ln/>
-        </p:spPr>
-        <p:txBody>
-          <a:bodyPr/>
-          <a:lstStyle/>
-          <a:p>
-            <a:endParaRPr lang="en-GB"/>
-          </a:p>
-        </p:txBody>
-      </p:sp>
-      <p:sp>
-        <p:nvSpPr>
           <p:cNvPr id="4" name="Text 2"/>
           <p:cNvSpPr/>
           <p:nvPr/>
@@ -4043,30 +4244,6 @@
           </a:p>
         </p:txBody>
       </p:sp>
-      <p:pic>
-        <p:nvPicPr>
-          <p:cNvPr id="14" name="Image 0" descr="preencoded.png"/>
-          <p:cNvPicPr>
-            <a:picLocks noChangeAspect="1"/>
-          </p:cNvPicPr>
-          <p:nvPr/>
-        </p:nvPicPr>
-        <p:blipFill>
-          <a:blip r:embed="rId3"/>
-          <a:stretch>
-            <a:fillRect/>
-          </a:stretch>
-        </p:blipFill>
-        <p:spPr>
-          <a:xfrm>
-            <a:off x="11167765" y="9867900"/>
-            <a:ext cx="5977235" cy="152400"/>
-          </a:xfrm>
-          <a:prstGeom prst="rect">
-            <a:avLst/>
-          </a:prstGeom>
-        </p:spPr>
-      </p:pic>
     </p:spTree>
   </p:cSld>
   <p:clrMapOvr>
@@ -4102,47 +4279,6 @@
       </p:grpSpPr>
       <p:sp>
         <p:nvSpPr>
-          <p:cNvPr id="2" name="Shape 0"/>
-          <p:cNvSpPr/>
-          <p:nvPr/>
-        </p:nvSpPr>
-        <p:spPr>
-          <a:xfrm>
-            <a:off x="0" y="0"/>
-            <a:ext cx="18288000" cy="10287000"/>
-          </a:xfrm>
-          <a:prstGeom prst="rect">
-            <a:avLst/>
-          </a:prstGeom>
-          <a:gradFill rotWithShape="1">
-            <a:gsLst>
-              <a:gs pos="0">
-                <a:srgbClr val="2B2741">
-                  <a:alpha val="75000"/>
-                </a:srgbClr>
-              </a:gs>
-              <a:gs pos="58000">
-                <a:srgbClr val="2B2741">
-                  <a:alpha val="0"/>
-                </a:srgbClr>
-              </a:gs>
-            </a:gsLst>
-            <a:path path="circle">
-              <a:fillToRect l="80000" r="20000" b="100000"/>
-            </a:path>
-          </a:gradFill>
-          <a:ln/>
-        </p:spPr>
-        <p:txBody>
-          <a:bodyPr/>
-          <a:lstStyle/>
-          <a:p>
-            <a:endParaRPr lang="en-GB"/>
-          </a:p>
-        </p:txBody>
-      </p:sp>
-      <p:sp>
-        <p:nvSpPr>
           <p:cNvPr id="4" name="Text 2"/>
           <p:cNvSpPr/>
           <p:nvPr/>
@@ -4289,30 +4425,6 @@
           </a:p>
         </p:txBody>
       </p:sp>
-      <p:pic>
-        <p:nvPicPr>
-          <p:cNvPr id="6" name="Image 0" descr="preencoded.png"/>
-          <p:cNvPicPr>
-            <a:picLocks noChangeAspect="1"/>
-          </p:cNvPicPr>
-          <p:nvPr/>
-        </p:nvPicPr>
-        <p:blipFill>
-          <a:blip r:embed="rId3"/>
-          <a:stretch>
-            <a:fillRect/>
-          </a:stretch>
-        </p:blipFill>
-        <p:spPr>
-          <a:xfrm>
-            <a:off x="11167765" y="9867900"/>
-            <a:ext cx="5977235" cy="152400"/>
-          </a:xfrm>
-          <a:prstGeom prst="rect">
-            <a:avLst/>
-          </a:prstGeom>
-        </p:spPr>
-      </p:pic>
     </p:spTree>
   </p:cSld>
   <p:clrMapOvr>
@@ -4346,47 +4458,6 @@
           <a:chExt cx="0" cy="0"/>
         </a:xfrm>
       </p:grpSpPr>
-      <p:sp>
-        <p:nvSpPr>
-          <p:cNvPr id="2" name="Shape 0"/>
-          <p:cNvSpPr/>
-          <p:nvPr/>
-        </p:nvSpPr>
-        <p:spPr>
-          <a:xfrm>
-            <a:off x="0" y="0"/>
-            <a:ext cx="18288000" cy="10287000"/>
-          </a:xfrm>
-          <a:prstGeom prst="rect">
-            <a:avLst/>
-          </a:prstGeom>
-          <a:gradFill rotWithShape="1">
-            <a:gsLst>
-              <a:gs pos="0">
-                <a:srgbClr val="353A80">
-                  <a:alpha val="70000"/>
-                </a:srgbClr>
-              </a:gs>
-              <a:gs pos="64000">
-                <a:srgbClr val="353A80">
-                  <a:alpha val="0"/>
-                </a:srgbClr>
-              </a:gs>
-            </a:gsLst>
-            <a:path path="circle">
-              <a:fillToRect l="22000" t="42000" r="78000" b="58000"/>
-            </a:path>
-          </a:gradFill>
-          <a:ln/>
-        </p:spPr>
-        <p:txBody>
-          <a:bodyPr/>
-          <a:lstStyle/>
-          <a:p>
-            <a:endParaRPr lang="en-GB"/>
-          </a:p>
-        </p:txBody>
-      </p:sp>
       <p:sp>
         <p:nvSpPr>
           <p:cNvPr id="3" name="Text 1"/>
@@ -5138,6 +5209,26 @@
 </file>
 
 <file path=customXml/item1.xml><?xml version="1.0" encoding="utf-8"?>
+<p:properties xmlns:p="http://schemas.microsoft.com/office/2006/metadata/properties" xmlns:xsi="http://www.w3.org/2001/XMLSchema-instance" xmlns:pc="http://schemas.microsoft.com/office/infopath/2007/PartnerControls">
+  <documentManagement>
+    <lcf76f155ced4ddcb4097134ff3c332f xmlns="d9df9240-fc95-4deb-9c9d-de700c44a7a7">
+      <Terms xmlns="http://schemas.microsoft.com/office/infopath/2007/PartnerControls"/>
+    </lcf76f155ced4ddcb4097134ff3c332f>
+    <TaxCatchAll xmlns="33363a87-7e43-46da-9332-4c6d176b06e4" xsi:nil="true"/>
+  </documentManagement>
+</p:properties>
+</file>
+
+<file path=customXml/item2.xml><?xml version="1.0" encoding="utf-8"?>
+<?mso-contentType ?>
+<FormTemplates xmlns="http://schemas.microsoft.com/sharepoint/v3/contenttype/forms">
+  <Display>DocumentLibraryForm</Display>
+  <Edit>DocumentLibraryForm</Edit>
+  <New>DocumentLibraryForm</New>
+</FormTemplates>
+</file>
+
+<file path=customXml/item3.xml><?xml version="1.0" encoding="utf-8"?>
 <ct:contentTypeSchema xmlns:ct="http://schemas.microsoft.com/office/2006/metadata/contentType" xmlns:ma="http://schemas.microsoft.com/office/2006/metadata/properties/metaAttributes" ct:_="" ma:_="" ma:contentTypeName="Document" ma:contentTypeID="0x0101000085964E25350F4FB3FE643AE11B2B20" ma:contentTypeVersion="10" ma:contentTypeDescription="Create a new document." ma:contentTypeScope="" ma:versionID="1e1d1b9c64e4e863bf8aa3867e361155">
   <xsd:schema xmlns:xsd="http://www.w3.org/2001/XMLSchema" xmlns:xs="http://www.w3.org/2001/XMLSchema" xmlns:p="http://schemas.microsoft.com/office/2006/metadata/properties" xmlns:ns2="d9df9240-fc95-4deb-9c9d-de700c44a7a7" xmlns:ns3="33363a87-7e43-46da-9332-4c6d176b06e4" targetNamespace="http://schemas.microsoft.com/office/2006/metadata/properties" ma:root="true" ma:fieldsID="6f44e94be1ec4ee84c894018ce3c7098" ns2:_="" ns3:_="">
     <xsd:import namespace="d9df9240-fc95-4deb-9c9d-de700c44a7a7"/>
@@ -5326,42 +5417,24 @@
 </ct:contentTypeSchema>
 </file>
 
-<file path=customXml/item2.xml><?xml version="1.0" encoding="utf-8"?>
-<p:properties xmlns:p="http://schemas.microsoft.com/office/2006/metadata/properties" xmlns:xsi="http://www.w3.org/2001/XMLSchema-instance" xmlns:pc="http://schemas.microsoft.com/office/infopath/2007/PartnerControls">
-  <documentManagement>
-    <lcf76f155ced4ddcb4097134ff3c332f xmlns="d9df9240-fc95-4deb-9c9d-de700c44a7a7">
-      <Terms xmlns="http://schemas.microsoft.com/office/infopath/2007/PartnerControls"/>
-    </lcf76f155ced4ddcb4097134ff3c332f>
-    <TaxCatchAll xmlns="33363a87-7e43-46da-9332-4c6d176b06e4" xsi:nil="true"/>
-  </documentManagement>
-</p:properties>
-</file>
-
-<file path=customXml/item3.xml><?xml version="1.0" encoding="utf-8"?>
-<?mso-contentType ?>
-<FormTemplates xmlns="http://schemas.microsoft.com/sharepoint/v3/contenttype/forms">
-  <Display>DocumentLibraryForm</Display>
-  <Edit>DocumentLibraryForm</Edit>
-  <New>DocumentLibraryForm</New>
-</FormTemplates>
-</file>
-
 <file path=customXml/itemProps1.xml><?xml version="1.0" encoding="utf-8"?>
-<ds:datastoreItem xmlns:ds="http://schemas.openxmlformats.org/officeDocument/2006/customXml" ds:itemID="{72141E45-92D7-484B-AA43-24E0B930BC77}"/>
-</file>
-
-<file path=customXml/itemProps2.xml><?xml version="1.0" encoding="utf-8"?>
 <ds:datastoreItem xmlns:ds="http://schemas.openxmlformats.org/officeDocument/2006/customXml" ds:itemID="{9B432692-6A3E-4F5F-8696-1C166D456D68}">
   <ds:schemaRefs>
+    <ds:schemaRef ds:uri="http://www.w3.org/XML/1998/namespace"/>
     <ds:schemaRef ds:uri="http://schemas.microsoft.com/office/2006/metadata/properties"/>
+    <ds:schemaRef ds:uri="http://purl.org/dc/terms/"/>
+    <ds:schemaRef ds:uri="http://purl.org/dc/dcmitype/"/>
+    <ds:schemaRef ds:uri="http://schemas.openxmlformats.org/package/2006/metadata/core-properties"/>
+    <ds:schemaRef ds:uri="http://schemas.microsoft.com/office/2006/documentManagement/types"/>
+    <ds:schemaRef ds:uri="33363a87-7e43-46da-9332-4c6d176b06e4"/>
+    <ds:schemaRef ds:uri="d9df9240-fc95-4deb-9c9d-de700c44a7a7"/>
+    <ds:schemaRef ds:uri="http://purl.org/dc/elements/1.1/"/>
     <ds:schemaRef ds:uri="http://schemas.microsoft.com/office/infopath/2007/PartnerControls"/>
-    <ds:schemaRef ds:uri="d9df9240-fc95-4deb-9c9d-de700c44a7a7"/>
-    <ds:schemaRef ds:uri="33363a87-7e43-46da-9332-4c6d176b06e4"/>
   </ds:schemaRefs>
 </ds:datastoreItem>
 </file>
 
-<file path=customXml/itemProps3.xml><?xml version="1.0" encoding="utf-8"?>
+<file path=customXml/itemProps2.xml><?xml version="1.0" encoding="utf-8"?>
 <ds:datastoreItem xmlns:ds="http://schemas.openxmlformats.org/officeDocument/2006/customXml" ds:itemID="{67E70711-8A6F-4F6A-895A-9EDA2D88838E}">
   <ds:schemaRefs>
     <ds:schemaRef ds:uri="http://schemas.microsoft.com/sharepoint/v3/contenttype/forms"/>
@@ -5369,6 +5442,10 @@
 </ds:datastoreItem>
 </file>
 
+<file path=customXml/itemProps3.xml><?xml version="1.0" encoding="utf-8"?>
+<ds:datastoreItem xmlns:ds="http://schemas.openxmlformats.org/officeDocument/2006/customXml" ds:itemID="{7313233A-7CD1-4D27-9E32-153F2EA6C169}"/>
+</file>
+
 <file path=docMetadata/LabelInfo.xml><?xml version="1.0" encoding="utf-8"?>
 <clbl:labelList xmlns:clbl="http://schemas.microsoft.com/office/2020/mipLabelMetadata">
   <clbl:label id="{defa4170-0d19-0005-0004-bc88714345d2}" enabled="1" method="Standard" siteId="{ffe9cb1d-3ae5-460e-857d-cc6afe98ae68}" removed="0"/>
